--- a/dist/초2/수학/도형과측정/초2_수학_도형과측정_03_길이재기_학생용.pptx
+++ b/dist/초2/수학/도형과측정/초2_수학_도형과측정_03_길이재기_학생용.pptx
@@ -121,13 +121,13 @@
   <p:extLst>
     <p:ext uri="{521415D9-36F7-43E2-AB2F-B90AF26B5E84}">
       <p14:sectionLst xmlns:p14="http://schemas.microsoft.com/office/powerpoint/2010/main">
-        <p14:section name="도입" id="{97143cbe-37c0-d4dd-bf8c-f0d19c8918d1}">
+        <p14:section name="도입" id="{e9a7f24e-787f-d301-b310-3d34628b2697}">
           <p14:sldIdLst>
             <p14:sldId id="256"/>
             <p14:sldId id="257"/>
           </p14:sldIdLst>
         </p14:section>
-        <p14:section name="개념" id="{2d2107f1-0997-62b0-4f12-b0b11c1b9682}">
+        <p14:section name="개념" id="{4d3f0218-d3b0-2108-3b17-82d4a8e70c73}">
           <p14:sldIdLst>
             <p14:sldId id="258"/>
             <p14:sldId id="259"/>
@@ -137,31 +137,31 @@
             <p14:sldId id="265"/>
           </p14:sldIdLst>
         </p14:section>
-        <p14:section name="연습" id="{4b734bcf-3436-9dcf-f616-24db09b555a2}">
+        <p14:section name="연습" id="{bf470ae0-cb7f-284d-16a2-b60697ec6637}">
           <p14:sldIdLst>
             <p14:sldId id="262"/>
             <p14:sldId id="263"/>
             <p14:sldId id="266"/>
           </p14:sldIdLst>
         </p14:section>
-        <p14:section name="개념" id="{68b0dbe6-d878-2067-b717-c54ed92c3b9a}">
+        <p14:section name="개념" id="{58004ac1-7970-3c69-6860-36285a40a95c}">
           <p14:sldIdLst/>
         </p14:section>
-        <p14:section name="연습" id="{48757048-dad9-1446-4a50-2ef29f8b01d8}">
+        <p14:section name="연습" id="{1710294d-dd12-fece-fc8a-6283fc172c8b}">
           <p14:sldIdLst/>
         </p14:section>
-        <p14:section name="확인" id="{1a0a68a5-b571-85d6-fc90-8501c576ffb5}">
+        <p14:section name="확인" id="{e1eb5e41-66c1-bdae-4217-ed0fdbbbd953}">
           <p14:sldIdLst>
             <p14:sldId id="267"/>
             <p14:sldId id="268"/>
           </p14:sldIdLst>
         </p14:section>
-        <p14:section name="정리" id="{81606329-8969-d61a-c2a4-3c0288e1ceb6}">
+        <p14:section name="정리" id="{32dec934-5f67-c3a8-cc04-979074661330}">
           <p14:sldIdLst>
             <p14:sldId id="269"/>
           </p14:sldIdLst>
         </p14:section>
-        <p14:section name="보충" id="{5f2a252b-4b99-78d5-b177-4b68e7f9b344}">
+        <p14:section name="보충" id="{6e61efc4-1955-f3bd-ee03-17e83e81ce71}">
           <p14:sldIdLst>
             <p14:sldId id="270"/>
           </p14:sldIdLst>
@@ -4202,7 +4202,7 @@
         </p:nvSpPr>
         <p:spPr>
           <a:xfrm>
-            <a:off x="548640" y="1773936"/>
+            <a:off x="548640" y="1945386"/>
             <a:ext cx="566928" cy="566928"/>
           </a:xfrm>
           <a:prstGeom prst="roundRect">
@@ -4249,8 +4249,8 @@
         </p:nvSpPr>
         <p:spPr>
           <a:xfrm>
-            <a:off x="1481328" y="2159000"/>
-            <a:ext cx="3931920" cy="0"/>
+            <a:off x="1481328" y="2445563"/>
+            <a:ext cx="4293108" cy="0"/>
           </a:xfrm>
           <a:prstGeom prst="line">
             <a:avLst/>
@@ -4274,7 +4274,7 @@
         </p:nvSpPr>
         <p:spPr>
           <a:xfrm>
-            <a:off x="1755648" y="2012696"/>
+            <a:off x="1755648" y="2299259"/>
             <a:ext cx="0" cy="292608"/>
           </a:xfrm>
           <a:prstGeom prst="line">
@@ -4297,7 +4297,7 @@
         </p:nvSpPr>
         <p:spPr>
           <a:xfrm>
-            <a:off x="1298448" y="2341880"/>
+            <a:off x="1298448" y="2628443"/>
             <a:ext cx="914400" cy="264160"/>
           </a:xfrm>
           <a:prstGeom prst="rect">
@@ -4336,7 +4336,7 @@
         </p:nvSpPr>
         <p:spPr>
           <a:xfrm>
-            <a:off x="2093976" y="2012696"/>
+            <a:off x="2130095" y="2299259"/>
             <a:ext cx="0" cy="292608"/>
           </a:xfrm>
           <a:prstGeom prst="line">
@@ -4359,7 +4359,7 @@
         </p:nvSpPr>
         <p:spPr>
           <a:xfrm>
-            <a:off x="1636776" y="2341880"/>
+            <a:off x="1672895" y="2628443"/>
             <a:ext cx="914400" cy="264160"/>
           </a:xfrm>
           <a:prstGeom prst="rect">
@@ -4398,7 +4398,7 @@
         </p:nvSpPr>
         <p:spPr>
           <a:xfrm>
-            <a:off x="2432304" y="2012696"/>
+            <a:off x="2504542" y="2299259"/>
             <a:ext cx="0" cy="292608"/>
           </a:xfrm>
           <a:prstGeom prst="line">
@@ -4421,7 +4421,7 @@
         </p:nvSpPr>
         <p:spPr>
           <a:xfrm>
-            <a:off x="1975104" y="2341880"/>
+            <a:off x="2047342" y="2628443"/>
             <a:ext cx="914400" cy="264160"/>
           </a:xfrm>
           <a:prstGeom prst="rect">
@@ -4460,7 +4460,7 @@
         </p:nvSpPr>
         <p:spPr>
           <a:xfrm>
-            <a:off x="2770632" y="2012696"/>
+            <a:off x="2878988" y="2299259"/>
             <a:ext cx="0" cy="292608"/>
           </a:xfrm>
           <a:prstGeom prst="line">
@@ -4483,7 +4483,7 @@
         </p:nvSpPr>
         <p:spPr>
           <a:xfrm>
-            <a:off x="2313432" y="2341880"/>
+            <a:off x="2421788" y="2628443"/>
             <a:ext cx="914400" cy="264160"/>
           </a:xfrm>
           <a:prstGeom prst="rect">
@@ -4522,7 +4522,7 @@
         </p:nvSpPr>
         <p:spPr>
           <a:xfrm>
-            <a:off x="3108960" y="2012696"/>
+            <a:off x="3253435" y="2299259"/>
             <a:ext cx="0" cy="292608"/>
           </a:xfrm>
           <a:prstGeom prst="line">
@@ -4545,7 +4545,7 @@
         </p:nvSpPr>
         <p:spPr>
           <a:xfrm>
-            <a:off x="2651760" y="2341880"/>
+            <a:off x="2796235" y="2628443"/>
             <a:ext cx="914400" cy="264160"/>
           </a:xfrm>
           <a:prstGeom prst="rect">
@@ -4584,7 +4584,7 @@
         </p:nvSpPr>
         <p:spPr>
           <a:xfrm>
-            <a:off x="3447288" y="2012696"/>
+            <a:off x="3627882" y="2299259"/>
             <a:ext cx="0" cy="292608"/>
           </a:xfrm>
           <a:prstGeom prst="line">
@@ -4607,7 +4607,7 @@
         </p:nvSpPr>
         <p:spPr>
           <a:xfrm>
-            <a:off x="2990088" y="2341880"/>
+            <a:off x="3170682" y="2628443"/>
             <a:ext cx="914400" cy="264160"/>
           </a:xfrm>
           <a:prstGeom prst="rect">
@@ -4646,7 +4646,7 @@
         </p:nvSpPr>
         <p:spPr>
           <a:xfrm>
-            <a:off x="3785616" y="2012696"/>
+            <a:off x="4002329" y="2299259"/>
             <a:ext cx="0" cy="292608"/>
           </a:xfrm>
           <a:prstGeom prst="line">
@@ -4669,7 +4669,7 @@
         </p:nvSpPr>
         <p:spPr>
           <a:xfrm>
-            <a:off x="3328416" y="2341880"/>
+            <a:off x="3545129" y="2628443"/>
             <a:ext cx="914400" cy="264160"/>
           </a:xfrm>
           <a:prstGeom prst="rect">
@@ -4708,7 +4708,7 @@
         </p:nvSpPr>
         <p:spPr>
           <a:xfrm>
-            <a:off x="4123944" y="2012696"/>
+            <a:off x="4376776" y="2299259"/>
             <a:ext cx="0" cy="292608"/>
           </a:xfrm>
           <a:prstGeom prst="line">
@@ -4731,7 +4731,7 @@
         </p:nvSpPr>
         <p:spPr>
           <a:xfrm>
-            <a:off x="3666744" y="2341880"/>
+            <a:off x="3919576" y="2628443"/>
             <a:ext cx="914400" cy="264160"/>
           </a:xfrm>
           <a:prstGeom prst="rect">
@@ -4770,7 +4770,7 @@
         </p:nvSpPr>
         <p:spPr>
           <a:xfrm>
-            <a:off x="4462272" y="2012696"/>
+            <a:off x="4751222" y="2299259"/>
             <a:ext cx="0" cy="292608"/>
           </a:xfrm>
           <a:prstGeom prst="line">
@@ -4793,7 +4793,7 @@
         </p:nvSpPr>
         <p:spPr>
           <a:xfrm>
-            <a:off x="4005072" y="2341880"/>
+            <a:off x="4294022" y="2628443"/>
             <a:ext cx="914400" cy="264160"/>
           </a:xfrm>
           <a:prstGeom prst="rect">
@@ -4832,7 +4832,7 @@
         </p:nvSpPr>
         <p:spPr>
           <a:xfrm>
-            <a:off x="4800600" y="2012696"/>
+            <a:off x="5125669" y="2299259"/>
             <a:ext cx="0" cy="292608"/>
           </a:xfrm>
           <a:prstGeom prst="line">
@@ -4855,7 +4855,7 @@
         </p:nvSpPr>
         <p:spPr>
           <a:xfrm>
-            <a:off x="4343400" y="2341880"/>
+            <a:off x="4668469" y="2628443"/>
             <a:ext cx="914400" cy="264160"/>
           </a:xfrm>
           <a:prstGeom prst="rect">
@@ -4894,7 +4894,7 @@
         </p:nvSpPr>
         <p:spPr>
           <a:xfrm>
-            <a:off x="5138928" y="2012696"/>
+            <a:off x="5500116" y="2299259"/>
             <a:ext cx="0" cy="292608"/>
           </a:xfrm>
           <a:prstGeom prst="line">
@@ -4917,7 +4917,7 @@
         </p:nvSpPr>
         <p:spPr>
           <a:xfrm>
-            <a:off x="4681728" y="2341880"/>
+            <a:off x="5042916" y="2628443"/>
             <a:ext cx="914400" cy="264160"/>
           </a:xfrm>
           <a:prstGeom prst="rect">
@@ -4956,7 +4956,7 @@
         </p:nvSpPr>
         <p:spPr>
           <a:xfrm>
-            <a:off x="1664208" y="2067560"/>
+            <a:off x="1664208" y="2354123"/>
             <a:ext cx="182880" cy="182880"/>
           </a:xfrm>
           <a:prstGeom prst="ellipse">
@@ -4981,7 +4981,7 @@
         </p:nvSpPr>
         <p:spPr>
           <a:xfrm>
-            <a:off x="3085186" y="2067560"/>
+            <a:off x="3236885" y="2354123"/>
             <a:ext cx="182880" cy="182880"/>
           </a:xfrm>
           <a:prstGeom prst="ellipse">
@@ -5006,7 +5006,7 @@
         </p:nvSpPr>
         <p:spPr>
           <a:xfrm flipV="1">
-            <a:off x="1755648" y="1774952"/>
+            <a:off x="1755648" y="2061515"/>
             <a:ext cx="0" cy="338328"/>
           </a:xfrm>
           <a:prstGeom prst="line">
@@ -5029,8 +5029,8 @@
         </p:nvSpPr>
         <p:spPr>
           <a:xfrm>
-            <a:off x="1755648" y="1774952"/>
-            <a:ext cx="1420978" cy="0"/>
+            <a:off x="1755648" y="2061515"/>
+            <a:ext cx="1572677" cy="0"/>
           </a:xfrm>
           <a:prstGeom prst="line">
             <a:avLst/>
@@ -5053,8 +5053,8 @@
         </p:nvSpPr>
         <p:spPr>
           <a:xfrm>
-            <a:off x="1755648" y="1492504"/>
-            <a:ext cx="1420978" cy="264160"/>
+            <a:off x="1755648" y="1779067"/>
+            <a:ext cx="1572677" cy="264160"/>
           </a:xfrm>
           <a:prstGeom prst="rect">
             <a:avLst/>
@@ -5092,8 +5092,8 @@
         </p:nvSpPr>
         <p:spPr>
           <a:xfrm>
-            <a:off x="1481328" y="1976120"/>
-            <a:ext cx="3931920" cy="365760"/>
+            <a:off x="1481328" y="2262683"/>
+            <a:ext cx="4293108" cy="365760"/>
           </a:xfrm>
           <a:prstGeom prst="rect">
             <a:avLst/>
@@ -5121,7 +5121,7 @@
         </p:nvSpPr>
         <p:spPr>
           <a:xfrm>
-            <a:off x="6277356" y="1773936"/>
+            <a:off x="6277356" y="1945386"/>
             <a:ext cx="566928" cy="566928"/>
           </a:xfrm>
           <a:prstGeom prst="roundRect">
@@ -5168,8 +5168,8 @@
         </p:nvSpPr>
         <p:spPr>
           <a:xfrm>
-            <a:off x="7210044" y="2159000"/>
-            <a:ext cx="3931920" cy="0"/>
+            <a:off x="7210044" y="2445563"/>
+            <a:ext cx="4293108" cy="0"/>
           </a:xfrm>
           <a:prstGeom prst="line">
             <a:avLst/>
@@ -5193,7 +5193,7 @@
         </p:nvSpPr>
         <p:spPr>
           <a:xfrm>
-            <a:off x="7484364" y="2012696"/>
+            <a:off x="7484364" y="2299259"/>
             <a:ext cx="0" cy="292608"/>
           </a:xfrm>
           <a:prstGeom prst="line">
@@ -5216,7 +5216,7 @@
         </p:nvSpPr>
         <p:spPr>
           <a:xfrm>
-            <a:off x="7027164" y="2341880"/>
+            <a:off x="7027164" y="2628443"/>
             <a:ext cx="914400" cy="264160"/>
           </a:xfrm>
           <a:prstGeom prst="rect">
@@ -5255,7 +5255,7 @@
         </p:nvSpPr>
         <p:spPr>
           <a:xfrm>
-            <a:off x="7822692" y="2012696"/>
+            <a:off x="7858811" y="2299259"/>
             <a:ext cx="0" cy="292608"/>
           </a:xfrm>
           <a:prstGeom prst="line">
@@ -5278,7 +5278,7 @@
         </p:nvSpPr>
         <p:spPr>
           <a:xfrm>
-            <a:off x="7365492" y="2341880"/>
+            <a:off x="7401611" y="2628443"/>
             <a:ext cx="914400" cy="264160"/>
           </a:xfrm>
           <a:prstGeom prst="rect">
@@ -5317,7 +5317,7 @@
         </p:nvSpPr>
         <p:spPr>
           <a:xfrm>
-            <a:off x="8161020" y="2012696"/>
+            <a:off x="8233258" y="2299259"/>
             <a:ext cx="0" cy="292608"/>
           </a:xfrm>
           <a:prstGeom prst="line">
@@ -5340,7 +5340,7 @@
         </p:nvSpPr>
         <p:spPr>
           <a:xfrm>
-            <a:off x="7703820" y="2341880"/>
+            <a:off x="7776058" y="2628443"/>
             <a:ext cx="914400" cy="264160"/>
           </a:xfrm>
           <a:prstGeom prst="rect">
@@ -5379,7 +5379,7 @@
         </p:nvSpPr>
         <p:spPr>
           <a:xfrm>
-            <a:off x="8499348" y="2012696"/>
+            <a:off x="8607704" y="2299259"/>
             <a:ext cx="0" cy="292608"/>
           </a:xfrm>
           <a:prstGeom prst="line">
@@ -5402,7 +5402,7 @@
         </p:nvSpPr>
         <p:spPr>
           <a:xfrm>
-            <a:off x="8042148" y="2341880"/>
+            <a:off x="8150504" y="2628443"/>
             <a:ext cx="914400" cy="264160"/>
           </a:xfrm>
           <a:prstGeom prst="rect">
@@ -5441,7 +5441,7 @@
         </p:nvSpPr>
         <p:spPr>
           <a:xfrm>
-            <a:off x="8837676" y="2012696"/>
+            <a:off x="8982151" y="2299259"/>
             <a:ext cx="0" cy="292608"/>
           </a:xfrm>
           <a:prstGeom prst="line">
@@ -5464,7 +5464,7 @@
         </p:nvSpPr>
         <p:spPr>
           <a:xfrm>
-            <a:off x="8380476" y="2341880"/>
+            <a:off x="8524951" y="2628443"/>
             <a:ext cx="914400" cy="264160"/>
           </a:xfrm>
           <a:prstGeom prst="rect">
@@ -5503,7 +5503,7 @@
         </p:nvSpPr>
         <p:spPr>
           <a:xfrm>
-            <a:off x="9176004" y="2012696"/>
+            <a:off x="9356598" y="2299259"/>
             <a:ext cx="0" cy="292608"/>
           </a:xfrm>
           <a:prstGeom prst="line">
@@ -5526,7 +5526,7 @@
         </p:nvSpPr>
         <p:spPr>
           <a:xfrm>
-            <a:off x="8718804" y="2341880"/>
+            <a:off x="8899398" y="2628443"/>
             <a:ext cx="914400" cy="264160"/>
           </a:xfrm>
           <a:prstGeom prst="rect">
@@ -5565,7 +5565,7 @@
         </p:nvSpPr>
         <p:spPr>
           <a:xfrm>
-            <a:off x="9514332" y="2012696"/>
+            <a:off x="9731045" y="2299259"/>
             <a:ext cx="0" cy="292608"/>
           </a:xfrm>
           <a:prstGeom prst="line">
@@ -5588,7 +5588,7 @@
         </p:nvSpPr>
         <p:spPr>
           <a:xfrm>
-            <a:off x="9057132" y="2341880"/>
+            <a:off x="9273845" y="2628443"/>
             <a:ext cx="914400" cy="264160"/>
           </a:xfrm>
           <a:prstGeom prst="rect">
@@ -5627,7 +5627,7 @@
         </p:nvSpPr>
         <p:spPr>
           <a:xfrm>
-            <a:off x="9852660" y="2012696"/>
+            <a:off x="10105492" y="2299259"/>
             <a:ext cx="0" cy="292608"/>
           </a:xfrm>
           <a:prstGeom prst="line">
@@ -5650,7 +5650,7 @@
         </p:nvSpPr>
         <p:spPr>
           <a:xfrm>
-            <a:off x="9395460" y="2341880"/>
+            <a:off x="9648292" y="2628443"/>
             <a:ext cx="914400" cy="264160"/>
           </a:xfrm>
           <a:prstGeom prst="rect">
@@ -5689,7 +5689,7 @@
         </p:nvSpPr>
         <p:spPr>
           <a:xfrm>
-            <a:off x="10190988" y="2012696"/>
+            <a:off x="10479938" y="2299259"/>
             <a:ext cx="0" cy="292608"/>
           </a:xfrm>
           <a:prstGeom prst="line">
@@ -5712,7 +5712,7 @@
         </p:nvSpPr>
         <p:spPr>
           <a:xfrm>
-            <a:off x="9733788" y="2341880"/>
+            <a:off x="10022738" y="2628443"/>
             <a:ext cx="914400" cy="264160"/>
           </a:xfrm>
           <a:prstGeom prst="rect">
@@ -5751,7 +5751,7 @@
         </p:nvSpPr>
         <p:spPr>
           <a:xfrm>
-            <a:off x="10529316" y="2012696"/>
+            <a:off x="10854385" y="2299259"/>
             <a:ext cx="0" cy="292608"/>
           </a:xfrm>
           <a:prstGeom prst="line">
@@ -5774,7 +5774,7 @@
         </p:nvSpPr>
         <p:spPr>
           <a:xfrm>
-            <a:off x="10072116" y="2341880"/>
+            <a:off x="10397185" y="2628443"/>
             <a:ext cx="914400" cy="264160"/>
           </a:xfrm>
           <a:prstGeom prst="rect">
@@ -5813,7 +5813,7 @@
         </p:nvSpPr>
         <p:spPr>
           <a:xfrm>
-            <a:off x="10867644" y="2012696"/>
+            <a:off x="11228832" y="2299259"/>
             <a:ext cx="0" cy="292608"/>
           </a:xfrm>
           <a:prstGeom prst="line">
@@ -5836,7 +5836,7 @@
         </p:nvSpPr>
         <p:spPr>
           <a:xfrm>
-            <a:off x="10410444" y="2341880"/>
+            <a:off x="10771632" y="2628443"/>
             <a:ext cx="914400" cy="264160"/>
           </a:xfrm>
           <a:prstGeom prst="rect">
@@ -5875,7 +5875,7 @@
         </p:nvSpPr>
         <p:spPr>
           <a:xfrm>
-            <a:off x="7392924" y="2067560"/>
+            <a:off x="7392924" y="2354123"/>
             <a:ext cx="182880" cy="182880"/>
           </a:xfrm>
           <a:prstGeom prst="ellipse">
@@ -5900,7 +5900,7 @@
         </p:nvSpPr>
         <p:spPr>
           <a:xfrm>
-            <a:off x="9152230" y="2067560"/>
+            <a:off x="9340047" y="2354123"/>
             <a:ext cx="182880" cy="182880"/>
           </a:xfrm>
           <a:prstGeom prst="ellipse">
@@ -5925,7 +5925,7 @@
         </p:nvSpPr>
         <p:spPr>
           <a:xfrm flipV="1">
-            <a:off x="7484364" y="1774952"/>
+            <a:off x="7484364" y="2061515"/>
             <a:ext cx="0" cy="338328"/>
           </a:xfrm>
           <a:prstGeom prst="line">
@@ -5948,8 +5948,8 @@
         </p:nvSpPr>
         <p:spPr>
           <a:xfrm>
-            <a:off x="7484364" y="1774952"/>
-            <a:ext cx="1759306" cy="0"/>
+            <a:off x="7484364" y="2061515"/>
+            <a:ext cx="1947123" cy="0"/>
           </a:xfrm>
           <a:prstGeom prst="line">
             <a:avLst/>
@@ -5972,8 +5972,8 @@
         </p:nvSpPr>
         <p:spPr>
           <a:xfrm>
-            <a:off x="7484364" y="1492504"/>
-            <a:ext cx="1759306" cy="264160"/>
+            <a:off x="7484364" y="1779067"/>
+            <a:ext cx="1947123" cy="264160"/>
           </a:xfrm>
           <a:prstGeom prst="rect">
             <a:avLst/>
@@ -6011,8 +6011,8 @@
         </p:nvSpPr>
         <p:spPr>
           <a:xfrm>
-            <a:off x="7210044" y="1976120"/>
-            <a:ext cx="3931920" cy="365760"/>
+            <a:off x="7210044" y="2262683"/>
+            <a:ext cx="4293108" cy="365760"/>
           </a:xfrm>
           <a:prstGeom prst="rect">
             <a:avLst/>
@@ -6326,7 +6326,7 @@
         </p:nvSpPr>
         <p:spPr>
           <a:xfrm>
-            <a:off x="548640" y="1773936"/>
+            <a:off x="548640" y="2219706"/>
             <a:ext cx="566928" cy="566928"/>
           </a:xfrm>
           <a:prstGeom prst="roundRect">
@@ -6373,8 +6373,8 @@
         </p:nvSpPr>
         <p:spPr>
           <a:xfrm>
-            <a:off x="1481328" y="2159000"/>
-            <a:ext cx="3931920" cy="0"/>
+            <a:off x="1481328" y="2785720"/>
+            <a:ext cx="4293108" cy="0"/>
           </a:xfrm>
           <a:prstGeom prst="line">
             <a:avLst/>
@@ -6398,7 +6398,7 @@
         </p:nvSpPr>
         <p:spPr>
           <a:xfrm>
-            <a:off x="1755648" y="2012696"/>
+            <a:off x="1755648" y="2639416"/>
             <a:ext cx="0" cy="292608"/>
           </a:xfrm>
           <a:prstGeom prst="line">
@@ -6421,7 +6421,7 @@
         </p:nvSpPr>
         <p:spPr>
           <a:xfrm>
-            <a:off x="1298448" y="2341880"/>
+            <a:off x="1298448" y="2968600"/>
             <a:ext cx="914400" cy="264160"/>
           </a:xfrm>
           <a:prstGeom prst="rect">
@@ -6460,7 +6460,7 @@
         </p:nvSpPr>
         <p:spPr>
           <a:xfrm>
-            <a:off x="2093976" y="2012696"/>
+            <a:off x="2130095" y="2639416"/>
             <a:ext cx="0" cy="292608"/>
           </a:xfrm>
           <a:prstGeom prst="line">
@@ -6483,7 +6483,7 @@
         </p:nvSpPr>
         <p:spPr>
           <a:xfrm>
-            <a:off x="1636776" y="2341880"/>
+            <a:off x="1672895" y="2968600"/>
             <a:ext cx="914400" cy="264160"/>
           </a:xfrm>
           <a:prstGeom prst="rect">
@@ -6522,7 +6522,7 @@
         </p:nvSpPr>
         <p:spPr>
           <a:xfrm>
-            <a:off x="2432304" y="2012696"/>
+            <a:off x="2504542" y="2639416"/>
             <a:ext cx="0" cy="292608"/>
           </a:xfrm>
           <a:prstGeom prst="line">
@@ -6545,7 +6545,7 @@
         </p:nvSpPr>
         <p:spPr>
           <a:xfrm>
-            <a:off x="1975104" y="2341880"/>
+            <a:off x="2047342" y="2968600"/>
             <a:ext cx="914400" cy="264160"/>
           </a:xfrm>
           <a:prstGeom prst="rect">
@@ -6584,7 +6584,7 @@
         </p:nvSpPr>
         <p:spPr>
           <a:xfrm>
-            <a:off x="2770632" y="2012696"/>
+            <a:off x="2878988" y="2639416"/>
             <a:ext cx="0" cy="292608"/>
           </a:xfrm>
           <a:prstGeom prst="line">
@@ -6607,7 +6607,7 @@
         </p:nvSpPr>
         <p:spPr>
           <a:xfrm>
-            <a:off x="2313432" y="2341880"/>
+            <a:off x="2421788" y="2968600"/>
             <a:ext cx="914400" cy="264160"/>
           </a:xfrm>
           <a:prstGeom prst="rect">
@@ -6646,7 +6646,7 @@
         </p:nvSpPr>
         <p:spPr>
           <a:xfrm>
-            <a:off x="3108960" y="2012696"/>
+            <a:off x="3253435" y="2639416"/>
             <a:ext cx="0" cy="292608"/>
           </a:xfrm>
           <a:prstGeom prst="line">
@@ -6669,7 +6669,7 @@
         </p:nvSpPr>
         <p:spPr>
           <a:xfrm>
-            <a:off x="2651760" y="2341880"/>
+            <a:off x="2796235" y="2968600"/>
             <a:ext cx="914400" cy="264160"/>
           </a:xfrm>
           <a:prstGeom prst="rect">
@@ -6708,7 +6708,7 @@
         </p:nvSpPr>
         <p:spPr>
           <a:xfrm>
-            <a:off x="3447288" y="2012696"/>
+            <a:off x="3627882" y="2639416"/>
             <a:ext cx="0" cy="292608"/>
           </a:xfrm>
           <a:prstGeom prst="line">
@@ -6731,7 +6731,7 @@
         </p:nvSpPr>
         <p:spPr>
           <a:xfrm>
-            <a:off x="2990088" y="2341880"/>
+            <a:off x="3170682" y="2968600"/>
             <a:ext cx="914400" cy="264160"/>
           </a:xfrm>
           <a:prstGeom prst="rect">
@@ -6770,7 +6770,7 @@
         </p:nvSpPr>
         <p:spPr>
           <a:xfrm>
-            <a:off x="3785616" y="2012696"/>
+            <a:off x="4002329" y="2639416"/>
             <a:ext cx="0" cy="292608"/>
           </a:xfrm>
           <a:prstGeom prst="line">
@@ -6793,7 +6793,7 @@
         </p:nvSpPr>
         <p:spPr>
           <a:xfrm>
-            <a:off x="3328416" y="2341880"/>
+            <a:off x="3545129" y="2968600"/>
             <a:ext cx="914400" cy="264160"/>
           </a:xfrm>
           <a:prstGeom prst="rect">
@@ -6832,7 +6832,7 @@
         </p:nvSpPr>
         <p:spPr>
           <a:xfrm>
-            <a:off x="4123944" y="2012696"/>
+            <a:off x="4376776" y="2639416"/>
             <a:ext cx="0" cy="292608"/>
           </a:xfrm>
           <a:prstGeom prst="line">
@@ -6855,7 +6855,7 @@
         </p:nvSpPr>
         <p:spPr>
           <a:xfrm>
-            <a:off x="3666744" y="2341880"/>
+            <a:off x="3919576" y="2968600"/>
             <a:ext cx="914400" cy="264160"/>
           </a:xfrm>
           <a:prstGeom prst="rect">
@@ -6894,7 +6894,7 @@
         </p:nvSpPr>
         <p:spPr>
           <a:xfrm>
-            <a:off x="4462272" y="2012696"/>
+            <a:off x="4751222" y="2639416"/>
             <a:ext cx="0" cy="292608"/>
           </a:xfrm>
           <a:prstGeom prst="line">
@@ -6917,7 +6917,7 @@
         </p:nvSpPr>
         <p:spPr>
           <a:xfrm>
-            <a:off x="4005072" y="2341880"/>
+            <a:off x="4294022" y="2968600"/>
             <a:ext cx="914400" cy="264160"/>
           </a:xfrm>
           <a:prstGeom prst="rect">
@@ -6956,7 +6956,7 @@
         </p:nvSpPr>
         <p:spPr>
           <a:xfrm>
-            <a:off x="4800600" y="2012696"/>
+            <a:off x="5125669" y="2639416"/>
             <a:ext cx="0" cy="292608"/>
           </a:xfrm>
           <a:prstGeom prst="line">
@@ -6979,7 +6979,7 @@
         </p:nvSpPr>
         <p:spPr>
           <a:xfrm>
-            <a:off x="4343400" y="2341880"/>
+            <a:off x="4668469" y="2968600"/>
             <a:ext cx="914400" cy="264160"/>
           </a:xfrm>
           <a:prstGeom prst="rect">
@@ -7018,7 +7018,7 @@
         </p:nvSpPr>
         <p:spPr>
           <a:xfrm>
-            <a:off x="5138928" y="2012696"/>
+            <a:off x="5500116" y="2639416"/>
             <a:ext cx="0" cy="292608"/>
           </a:xfrm>
           <a:prstGeom prst="line">
@@ -7041,7 +7041,7 @@
         </p:nvSpPr>
         <p:spPr>
           <a:xfrm>
-            <a:off x="4681728" y="2341880"/>
+            <a:off x="5042916" y="2968600"/>
             <a:ext cx="914400" cy="264160"/>
           </a:xfrm>
           <a:prstGeom prst="rect">
@@ -7080,7 +7080,7 @@
         </p:nvSpPr>
         <p:spPr>
           <a:xfrm>
-            <a:off x="2340864" y="2067560"/>
+            <a:off x="2413102" y="2694280"/>
             <a:ext cx="182880" cy="182880"/>
           </a:xfrm>
           <a:prstGeom prst="ellipse">
@@ -7105,7 +7105,7 @@
         </p:nvSpPr>
         <p:spPr>
           <a:xfrm>
-            <a:off x="4370832" y="2067560"/>
+            <a:off x="4659782" y="2694280"/>
             <a:ext cx="182880" cy="182880"/>
           </a:xfrm>
           <a:prstGeom prst="ellipse">
@@ -7130,7 +7130,7 @@
         </p:nvSpPr>
         <p:spPr>
           <a:xfrm flipV="1">
-            <a:off x="2432304" y="1774952"/>
+            <a:off x="2504542" y="2401672"/>
             <a:ext cx="0" cy="338328"/>
           </a:xfrm>
           <a:prstGeom prst="line">
@@ -7153,8 +7153,8 @@
         </p:nvSpPr>
         <p:spPr>
           <a:xfrm>
-            <a:off x="2432304" y="1774952"/>
-            <a:ext cx="2029968" cy="0"/>
+            <a:off x="2504542" y="2401672"/>
+            <a:ext cx="2246681" cy="0"/>
           </a:xfrm>
           <a:prstGeom prst="line">
             <a:avLst/>
@@ -7177,8 +7177,8 @@
         </p:nvSpPr>
         <p:spPr>
           <a:xfrm>
-            <a:off x="2432304" y="1492504"/>
-            <a:ext cx="2029968" cy="264160"/>
+            <a:off x="2504542" y="2119224"/>
+            <a:ext cx="2246681" cy="264160"/>
           </a:xfrm>
           <a:prstGeom prst="rect">
             <a:avLst/>
@@ -7216,8 +7216,8 @@
         </p:nvSpPr>
         <p:spPr>
           <a:xfrm>
-            <a:off x="1481328" y="1976120"/>
-            <a:ext cx="3931920" cy="365760"/>
+            <a:off x="1481328" y="2602840"/>
+            <a:ext cx="4293108" cy="365760"/>
           </a:xfrm>
           <a:prstGeom prst="rect">
             <a:avLst/>
@@ -7245,7 +7245,7 @@
         </p:nvSpPr>
         <p:spPr>
           <a:xfrm>
-            <a:off x="6277356" y="1773936"/>
+            <a:off x="6277356" y="2219706"/>
             <a:ext cx="566928" cy="566928"/>
           </a:xfrm>
           <a:prstGeom prst="roundRect">
@@ -7292,8 +7292,8 @@
         </p:nvSpPr>
         <p:spPr>
           <a:xfrm>
-            <a:off x="7210044" y="2159000"/>
-            <a:ext cx="3931920" cy="0"/>
+            <a:off x="7210044" y="2785720"/>
+            <a:ext cx="4293108" cy="0"/>
           </a:xfrm>
           <a:prstGeom prst="line">
             <a:avLst/>
@@ -7317,7 +7317,7 @@
         </p:nvSpPr>
         <p:spPr>
           <a:xfrm>
-            <a:off x="7484364" y="2012696"/>
+            <a:off x="7484364" y="2639416"/>
             <a:ext cx="0" cy="292608"/>
           </a:xfrm>
           <a:prstGeom prst="line">
@@ -7340,7 +7340,7 @@
         </p:nvSpPr>
         <p:spPr>
           <a:xfrm>
-            <a:off x="7027164" y="2341880"/>
+            <a:off x="7027164" y="2968600"/>
             <a:ext cx="914400" cy="264160"/>
           </a:xfrm>
           <a:prstGeom prst="rect">
@@ -7379,7 +7379,7 @@
         </p:nvSpPr>
         <p:spPr>
           <a:xfrm>
-            <a:off x="7822692" y="2012696"/>
+            <a:off x="7858811" y="2639416"/>
             <a:ext cx="0" cy="292608"/>
           </a:xfrm>
           <a:prstGeom prst="line">
@@ -7402,7 +7402,7 @@
         </p:nvSpPr>
         <p:spPr>
           <a:xfrm>
-            <a:off x="7365492" y="2341880"/>
+            <a:off x="7401611" y="2968600"/>
             <a:ext cx="914400" cy="264160"/>
           </a:xfrm>
           <a:prstGeom prst="rect">
@@ -7441,7 +7441,7 @@
         </p:nvSpPr>
         <p:spPr>
           <a:xfrm>
-            <a:off x="8161020" y="2012696"/>
+            <a:off x="8233258" y="2639416"/>
             <a:ext cx="0" cy="292608"/>
           </a:xfrm>
           <a:prstGeom prst="line">
@@ -7464,7 +7464,7 @@
         </p:nvSpPr>
         <p:spPr>
           <a:xfrm>
-            <a:off x="7703820" y="2341880"/>
+            <a:off x="7776058" y="2968600"/>
             <a:ext cx="914400" cy="264160"/>
           </a:xfrm>
           <a:prstGeom prst="rect">
@@ -7503,7 +7503,7 @@
         </p:nvSpPr>
         <p:spPr>
           <a:xfrm>
-            <a:off x="8499348" y="2012696"/>
+            <a:off x="8607704" y="2639416"/>
             <a:ext cx="0" cy="292608"/>
           </a:xfrm>
           <a:prstGeom prst="line">
@@ -7526,7 +7526,7 @@
         </p:nvSpPr>
         <p:spPr>
           <a:xfrm>
-            <a:off x="8042148" y="2341880"/>
+            <a:off x="8150504" y="2968600"/>
             <a:ext cx="914400" cy="264160"/>
           </a:xfrm>
           <a:prstGeom prst="rect">
@@ -7565,7 +7565,7 @@
         </p:nvSpPr>
         <p:spPr>
           <a:xfrm>
-            <a:off x="8837676" y="2012696"/>
+            <a:off x="8982151" y="2639416"/>
             <a:ext cx="0" cy="292608"/>
           </a:xfrm>
           <a:prstGeom prst="line">
@@ -7588,7 +7588,7 @@
         </p:nvSpPr>
         <p:spPr>
           <a:xfrm>
-            <a:off x="8380476" y="2341880"/>
+            <a:off x="8524951" y="2968600"/>
             <a:ext cx="914400" cy="264160"/>
           </a:xfrm>
           <a:prstGeom prst="rect">
@@ -7627,7 +7627,7 @@
         </p:nvSpPr>
         <p:spPr>
           <a:xfrm>
-            <a:off x="9176004" y="2012696"/>
+            <a:off x="9356598" y="2639416"/>
             <a:ext cx="0" cy="292608"/>
           </a:xfrm>
           <a:prstGeom prst="line">
@@ -7650,7 +7650,7 @@
         </p:nvSpPr>
         <p:spPr>
           <a:xfrm>
-            <a:off x="8718804" y="2341880"/>
+            <a:off x="8899398" y="2968600"/>
             <a:ext cx="914400" cy="264160"/>
           </a:xfrm>
           <a:prstGeom prst="rect">
@@ -7689,7 +7689,7 @@
         </p:nvSpPr>
         <p:spPr>
           <a:xfrm>
-            <a:off x="9514332" y="2012696"/>
+            <a:off x="9731045" y="2639416"/>
             <a:ext cx="0" cy="292608"/>
           </a:xfrm>
           <a:prstGeom prst="line">
@@ -7712,7 +7712,7 @@
         </p:nvSpPr>
         <p:spPr>
           <a:xfrm>
-            <a:off x="9057132" y="2341880"/>
+            <a:off x="9273845" y="2968600"/>
             <a:ext cx="914400" cy="264160"/>
           </a:xfrm>
           <a:prstGeom prst="rect">
@@ -7751,7 +7751,7 @@
         </p:nvSpPr>
         <p:spPr>
           <a:xfrm>
-            <a:off x="9852660" y="2012696"/>
+            <a:off x="10105492" y="2639416"/>
             <a:ext cx="0" cy="292608"/>
           </a:xfrm>
           <a:prstGeom prst="line">
@@ -7774,7 +7774,7 @@
         </p:nvSpPr>
         <p:spPr>
           <a:xfrm>
-            <a:off x="9395460" y="2341880"/>
+            <a:off x="9648292" y="2968600"/>
             <a:ext cx="914400" cy="264160"/>
           </a:xfrm>
           <a:prstGeom prst="rect">
@@ -7813,7 +7813,7 @@
         </p:nvSpPr>
         <p:spPr>
           <a:xfrm>
-            <a:off x="10190988" y="2012696"/>
+            <a:off x="10479938" y="2639416"/>
             <a:ext cx="0" cy="292608"/>
           </a:xfrm>
           <a:prstGeom prst="line">
@@ -7836,7 +7836,7 @@
         </p:nvSpPr>
         <p:spPr>
           <a:xfrm>
-            <a:off x="9733788" y="2341880"/>
+            <a:off x="10022738" y="2968600"/>
             <a:ext cx="914400" cy="264160"/>
           </a:xfrm>
           <a:prstGeom prst="rect">
@@ -7875,7 +7875,7 @@
         </p:nvSpPr>
         <p:spPr>
           <a:xfrm>
-            <a:off x="10529316" y="2012696"/>
+            <a:off x="10854385" y="2639416"/>
             <a:ext cx="0" cy="292608"/>
           </a:xfrm>
           <a:prstGeom prst="line">
@@ -7898,7 +7898,7 @@
         </p:nvSpPr>
         <p:spPr>
           <a:xfrm>
-            <a:off x="10072116" y="2341880"/>
+            <a:off x="10397185" y="2968600"/>
             <a:ext cx="914400" cy="264160"/>
           </a:xfrm>
           <a:prstGeom prst="rect">
@@ -7937,7 +7937,7 @@
         </p:nvSpPr>
         <p:spPr>
           <a:xfrm>
-            <a:off x="10867644" y="2012696"/>
+            <a:off x="11228832" y="2639416"/>
             <a:ext cx="0" cy="292608"/>
           </a:xfrm>
           <a:prstGeom prst="line">
@@ -7960,7 +7960,7 @@
         </p:nvSpPr>
         <p:spPr>
           <a:xfrm>
-            <a:off x="10410444" y="2341880"/>
+            <a:off x="10771632" y="2968600"/>
             <a:ext cx="914400" cy="264160"/>
           </a:xfrm>
           <a:prstGeom prst="rect">
@@ -7999,7 +7999,7 @@
         </p:nvSpPr>
         <p:spPr>
           <a:xfrm>
-            <a:off x="7392924" y="2067560"/>
+            <a:off x="7392924" y="2694280"/>
             <a:ext cx="182880" cy="182880"/>
           </a:xfrm>
           <a:prstGeom prst="ellipse">
@@ -8024,7 +8024,7 @@
         </p:nvSpPr>
         <p:spPr>
           <a:xfrm>
-            <a:off x="10404043" y="2067560"/>
+            <a:off x="10725501" y="2694280"/>
             <a:ext cx="182880" cy="182880"/>
           </a:xfrm>
           <a:prstGeom prst="ellipse">
@@ -8049,7 +8049,7 @@
         </p:nvSpPr>
         <p:spPr>
           <a:xfrm flipV="1">
-            <a:off x="7484364" y="1774952"/>
+            <a:off x="7484364" y="2401672"/>
             <a:ext cx="0" cy="338328"/>
           </a:xfrm>
           <a:prstGeom prst="line">
@@ -8072,8 +8072,8 @@
         </p:nvSpPr>
         <p:spPr>
           <a:xfrm>
-            <a:off x="7484364" y="1774952"/>
-            <a:ext cx="3011119" cy="0"/>
+            <a:off x="7484364" y="2401672"/>
+            <a:ext cx="3332577" cy="0"/>
           </a:xfrm>
           <a:prstGeom prst="line">
             <a:avLst/>
@@ -8096,8 +8096,8 @@
         </p:nvSpPr>
         <p:spPr>
           <a:xfrm>
-            <a:off x="7484364" y="1492504"/>
-            <a:ext cx="3011119" cy="264160"/>
+            <a:off x="7484364" y="2119224"/>
+            <a:ext cx="3332577" cy="264160"/>
           </a:xfrm>
           <a:prstGeom prst="rect">
             <a:avLst/>
@@ -8135,8 +8135,8 @@
         </p:nvSpPr>
         <p:spPr>
           <a:xfrm>
-            <a:off x="7210044" y="1976120"/>
-            <a:ext cx="3931920" cy="365760"/>
+            <a:off x="7210044" y="2602840"/>
+            <a:ext cx="4293108" cy="365760"/>
           </a:xfrm>
           <a:prstGeom prst="rect">
             <a:avLst/>
@@ -13422,7 +13422,7 @@
         </p:nvSpPr>
         <p:spPr>
           <a:xfrm>
-            <a:off x="548640" y="2459736"/>
+            <a:off x="548640" y="2734056"/>
             <a:ext cx="566928" cy="566928"/>
           </a:xfrm>
           <a:prstGeom prst="roundRect">
@@ -13469,8 +13469,8 @@
         </p:nvSpPr>
         <p:spPr>
           <a:xfrm>
-            <a:off x="1344168" y="2042160"/>
-            <a:ext cx="701040" cy="701040"/>
+            <a:off x="1344168" y="2103120"/>
+            <a:ext cx="914400" cy="914400"/>
           </a:xfrm>
           <a:prstGeom prst="rect">
             <a:avLst/>
@@ -13494,8 +13494,8 @@
         </p:nvSpPr>
         <p:spPr>
           <a:xfrm>
-            <a:off x="2045208" y="2042160"/>
-            <a:ext cx="701040" cy="701040"/>
+            <a:off x="2258568" y="2103120"/>
+            <a:ext cx="914400" cy="914400"/>
           </a:xfrm>
           <a:prstGeom prst="rect">
             <a:avLst/>
@@ -13519,8 +13519,8 @@
         </p:nvSpPr>
         <p:spPr>
           <a:xfrm>
-            <a:off x="2746248" y="2042160"/>
-            <a:ext cx="701040" cy="701040"/>
+            <a:off x="3172968" y="2103120"/>
+            <a:ext cx="914400" cy="914400"/>
           </a:xfrm>
           <a:prstGeom prst="rect">
             <a:avLst/>
@@ -13544,8 +13544,8 @@
         </p:nvSpPr>
         <p:spPr>
           <a:xfrm>
-            <a:off x="3447288" y="2042160"/>
-            <a:ext cx="701040" cy="701040"/>
+            <a:off x="4087368" y="2103120"/>
+            <a:ext cx="914400" cy="914400"/>
           </a:xfrm>
           <a:prstGeom prst="rect">
             <a:avLst/>
@@ -13569,8 +13569,8 @@
         </p:nvSpPr>
         <p:spPr>
           <a:xfrm>
-            <a:off x="4148328" y="2042160"/>
-            <a:ext cx="701040" cy="701040"/>
+            <a:off x="5001768" y="2103120"/>
+            <a:ext cx="914400" cy="914400"/>
           </a:xfrm>
           <a:prstGeom prst="rect">
             <a:avLst/>
@@ -13594,8 +13594,8 @@
         </p:nvSpPr>
         <p:spPr>
           <a:xfrm>
-            <a:off x="4849368" y="2042160"/>
-            <a:ext cx="701040" cy="701040"/>
+            <a:off x="5916168" y="2103120"/>
+            <a:ext cx="914400" cy="914400"/>
           </a:xfrm>
           <a:prstGeom prst="rect">
             <a:avLst/>
@@ -13619,8 +13619,8 @@
         </p:nvSpPr>
         <p:spPr>
           <a:xfrm>
-            <a:off x="1344168" y="2743200"/>
-            <a:ext cx="701040" cy="701040"/>
+            <a:off x="1344168" y="3017520"/>
+            <a:ext cx="914400" cy="914400"/>
           </a:xfrm>
           <a:prstGeom prst="rect">
             <a:avLst/>
@@ -13644,8 +13644,8 @@
         </p:nvSpPr>
         <p:spPr>
           <a:xfrm>
-            <a:off x="2045208" y="2743200"/>
-            <a:ext cx="701040" cy="701040"/>
+            <a:off x="2258568" y="3017520"/>
+            <a:ext cx="914400" cy="914400"/>
           </a:xfrm>
           <a:prstGeom prst="rect">
             <a:avLst/>
@@ -13669,8 +13669,8 @@
         </p:nvSpPr>
         <p:spPr>
           <a:xfrm>
-            <a:off x="2746248" y="2743200"/>
-            <a:ext cx="701040" cy="701040"/>
+            <a:off x="3172968" y="3017520"/>
+            <a:ext cx="914400" cy="914400"/>
           </a:xfrm>
           <a:prstGeom prst="rect">
             <a:avLst/>
@@ -13694,8 +13694,8 @@
         </p:nvSpPr>
         <p:spPr>
           <a:xfrm>
-            <a:off x="3447288" y="2743200"/>
-            <a:ext cx="701040" cy="701040"/>
+            <a:off x="4087368" y="3017520"/>
+            <a:ext cx="914400" cy="914400"/>
           </a:xfrm>
           <a:prstGeom prst="rect">
             <a:avLst/>
@@ -13719,8 +13719,8 @@
         </p:nvSpPr>
         <p:spPr>
           <a:xfrm>
-            <a:off x="4148328" y="2743200"/>
-            <a:ext cx="701040" cy="701040"/>
+            <a:off x="5001768" y="3017520"/>
+            <a:ext cx="914400" cy="914400"/>
           </a:xfrm>
           <a:prstGeom prst="rect">
             <a:avLst/>
@@ -13744,8 +13744,8 @@
         </p:nvSpPr>
         <p:spPr>
           <a:xfrm>
-            <a:off x="4849368" y="2743200"/>
-            <a:ext cx="701040" cy="701040"/>
+            <a:off x="5916168" y="3017520"/>
+            <a:ext cx="914400" cy="914400"/>
           </a:xfrm>
           <a:prstGeom prst="rect">
             <a:avLst/>
@@ -13769,8 +13769,8 @@
         </p:nvSpPr>
         <p:spPr>
           <a:xfrm>
-            <a:off x="1344168" y="2042160"/>
-            <a:ext cx="4206240" cy="1402080"/>
+            <a:off x="1344168" y="2103120"/>
+            <a:ext cx="5486400" cy="1828800"/>
           </a:xfrm>
           <a:prstGeom prst="rect">
             <a:avLst/>
@@ -18249,7 +18249,7 @@
         </p:nvSpPr>
         <p:spPr>
           <a:xfrm>
-            <a:off x="548640" y="1773936"/>
+            <a:off x="548640" y="1945386"/>
             <a:ext cx="566928" cy="566928"/>
           </a:xfrm>
           <a:prstGeom prst="roundRect">
@@ -18296,8 +18296,8 @@
         </p:nvSpPr>
         <p:spPr>
           <a:xfrm>
-            <a:off x="1481328" y="2159000"/>
-            <a:ext cx="3931920" cy="0"/>
+            <a:off x="1481328" y="2445563"/>
+            <a:ext cx="4293108" cy="0"/>
           </a:xfrm>
           <a:prstGeom prst="line">
             <a:avLst/>
@@ -18321,7 +18321,7 @@
         </p:nvSpPr>
         <p:spPr>
           <a:xfrm>
-            <a:off x="1755648" y="2012696"/>
+            <a:off x="1755648" y="2299259"/>
             <a:ext cx="0" cy="292608"/>
           </a:xfrm>
           <a:prstGeom prst="line">
@@ -18344,7 +18344,7 @@
         </p:nvSpPr>
         <p:spPr>
           <a:xfrm>
-            <a:off x="1298448" y="2341880"/>
+            <a:off x="1298448" y="2628443"/>
             <a:ext cx="914400" cy="264160"/>
           </a:xfrm>
           <a:prstGeom prst="rect">
@@ -18383,7 +18383,7 @@
         </p:nvSpPr>
         <p:spPr>
           <a:xfrm>
-            <a:off x="2093976" y="2012696"/>
+            <a:off x="2130095" y="2299259"/>
             <a:ext cx="0" cy="292608"/>
           </a:xfrm>
           <a:prstGeom prst="line">
@@ -18406,7 +18406,7 @@
         </p:nvSpPr>
         <p:spPr>
           <a:xfrm>
-            <a:off x="1636776" y="2341880"/>
+            <a:off x="1672895" y="2628443"/>
             <a:ext cx="914400" cy="264160"/>
           </a:xfrm>
           <a:prstGeom prst="rect">
@@ -18445,7 +18445,7 @@
         </p:nvSpPr>
         <p:spPr>
           <a:xfrm>
-            <a:off x="2432304" y="2012696"/>
+            <a:off x="2504542" y="2299259"/>
             <a:ext cx="0" cy="292608"/>
           </a:xfrm>
           <a:prstGeom prst="line">
@@ -18468,7 +18468,7 @@
         </p:nvSpPr>
         <p:spPr>
           <a:xfrm>
-            <a:off x="1975104" y="2341880"/>
+            <a:off x="2047342" y="2628443"/>
             <a:ext cx="914400" cy="264160"/>
           </a:xfrm>
           <a:prstGeom prst="rect">
@@ -18507,7 +18507,7 @@
         </p:nvSpPr>
         <p:spPr>
           <a:xfrm>
-            <a:off x="2770632" y="2012696"/>
+            <a:off x="2878988" y="2299259"/>
             <a:ext cx="0" cy="292608"/>
           </a:xfrm>
           <a:prstGeom prst="line">
@@ -18530,7 +18530,7 @@
         </p:nvSpPr>
         <p:spPr>
           <a:xfrm>
-            <a:off x="2313432" y="2341880"/>
+            <a:off x="2421788" y="2628443"/>
             <a:ext cx="914400" cy="264160"/>
           </a:xfrm>
           <a:prstGeom prst="rect">
@@ -18569,7 +18569,7 @@
         </p:nvSpPr>
         <p:spPr>
           <a:xfrm>
-            <a:off x="3108960" y="2012696"/>
+            <a:off x="3253435" y="2299259"/>
             <a:ext cx="0" cy="292608"/>
           </a:xfrm>
           <a:prstGeom prst="line">
@@ -18592,7 +18592,7 @@
         </p:nvSpPr>
         <p:spPr>
           <a:xfrm>
-            <a:off x="2651760" y="2341880"/>
+            <a:off x="2796235" y="2628443"/>
             <a:ext cx="914400" cy="264160"/>
           </a:xfrm>
           <a:prstGeom prst="rect">
@@ -18631,7 +18631,7 @@
         </p:nvSpPr>
         <p:spPr>
           <a:xfrm>
-            <a:off x="3447288" y="2012696"/>
+            <a:off x="3627882" y="2299259"/>
             <a:ext cx="0" cy="292608"/>
           </a:xfrm>
           <a:prstGeom prst="line">
@@ -18654,7 +18654,7 @@
         </p:nvSpPr>
         <p:spPr>
           <a:xfrm>
-            <a:off x="2990088" y="2341880"/>
+            <a:off x="3170682" y="2628443"/>
             <a:ext cx="914400" cy="264160"/>
           </a:xfrm>
           <a:prstGeom prst="rect">
@@ -18693,7 +18693,7 @@
         </p:nvSpPr>
         <p:spPr>
           <a:xfrm>
-            <a:off x="3785616" y="2012696"/>
+            <a:off x="4002329" y="2299259"/>
             <a:ext cx="0" cy="292608"/>
           </a:xfrm>
           <a:prstGeom prst="line">
@@ -18716,7 +18716,7 @@
         </p:nvSpPr>
         <p:spPr>
           <a:xfrm>
-            <a:off x="3328416" y="2341880"/>
+            <a:off x="3545129" y="2628443"/>
             <a:ext cx="914400" cy="264160"/>
           </a:xfrm>
           <a:prstGeom prst="rect">
@@ -18755,7 +18755,7 @@
         </p:nvSpPr>
         <p:spPr>
           <a:xfrm>
-            <a:off x="4123944" y="2012696"/>
+            <a:off x="4376776" y="2299259"/>
             <a:ext cx="0" cy="292608"/>
           </a:xfrm>
           <a:prstGeom prst="line">
@@ -18778,7 +18778,7 @@
         </p:nvSpPr>
         <p:spPr>
           <a:xfrm>
-            <a:off x="3666744" y="2341880"/>
+            <a:off x="3919576" y="2628443"/>
             <a:ext cx="914400" cy="264160"/>
           </a:xfrm>
           <a:prstGeom prst="rect">
@@ -18817,7 +18817,7 @@
         </p:nvSpPr>
         <p:spPr>
           <a:xfrm>
-            <a:off x="4462272" y="2012696"/>
+            <a:off x="4751222" y="2299259"/>
             <a:ext cx="0" cy="292608"/>
           </a:xfrm>
           <a:prstGeom prst="line">
@@ -18840,7 +18840,7 @@
         </p:nvSpPr>
         <p:spPr>
           <a:xfrm>
-            <a:off x="4005072" y="2341880"/>
+            <a:off x="4294022" y="2628443"/>
             <a:ext cx="914400" cy="264160"/>
           </a:xfrm>
           <a:prstGeom prst="rect">
@@ -18879,7 +18879,7 @@
         </p:nvSpPr>
         <p:spPr>
           <a:xfrm>
-            <a:off x="4800600" y="2012696"/>
+            <a:off x="5125669" y="2299259"/>
             <a:ext cx="0" cy="292608"/>
           </a:xfrm>
           <a:prstGeom prst="line">
@@ -18902,7 +18902,7 @@
         </p:nvSpPr>
         <p:spPr>
           <a:xfrm>
-            <a:off x="4343400" y="2341880"/>
+            <a:off x="4668469" y="2628443"/>
             <a:ext cx="914400" cy="264160"/>
           </a:xfrm>
           <a:prstGeom prst="rect">
@@ -18941,7 +18941,7 @@
         </p:nvSpPr>
         <p:spPr>
           <a:xfrm>
-            <a:off x="5138928" y="2012696"/>
+            <a:off x="5500116" y="2299259"/>
             <a:ext cx="0" cy="292608"/>
           </a:xfrm>
           <a:prstGeom prst="line">
@@ -18964,7 +18964,7 @@
         </p:nvSpPr>
         <p:spPr>
           <a:xfrm>
-            <a:off x="4681728" y="2341880"/>
+            <a:off x="5042916" y="2628443"/>
             <a:ext cx="914400" cy="264160"/>
           </a:xfrm>
           <a:prstGeom prst="rect">
@@ -19003,7 +19003,7 @@
         </p:nvSpPr>
         <p:spPr>
           <a:xfrm>
-            <a:off x="1664208" y="2067560"/>
+            <a:off x="1664208" y="2354123"/>
             <a:ext cx="182880" cy="182880"/>
           </a:xfrm>
           <a:prstGeom prst="ellipse">
@@ -19028,7 +19028,7 @@
         </p:nvSpPr>
         <p:spPr>
           <a:xfrm>
-            <a:off x="2679192" y="2067560"/>
+            <a:off x="2787548" y="2354123"/>
             <a:ext cx="182880" cy="182880"/>
           </a:xfrm>
           <a:prstGeom prst="ellipse">
@@ -19053,7 +19053,7 @@
         </p:nvSpPr>
         <p:spPr>
           <a:xfrm flipV="1">
-            <a:off x="1755648" y="1774952"/>
+            <a:off x="1755648" y="2061515"/>
             <a:ext cx="0" cy="338328"/>
           </a:xfrm>
           <a:prstGeom prst="line">
@@ -19076,8 +19076,8 @@
         </p:nvSpPr>
         <p:spPr>
           <a:xfrm>
-            <a:off x="1755648" y="1774952"/>
-            <a:ext cx="1014984" cy="0"/>
+            <a:off x="1755648" y="2061515"/>
+            <a:ext cx="1123340" cy="0"/>
           </a:xfrm>
           <a:prstGeom prst="line">
             <a:avLst/>
@@ -19100,8 +19100,8 @@
         </p:nvSpPr>
         <p:spPr>
           <a:xfrm>
-            <a:off x="1755648" y="1492504"/>
-            <a:ext cx="1014984" cy="264160"/>
+            <a:off x="1755648" y="1779067"/>
+            <a:ext cx="1123340" cy="264160"/>
           </a:xfrm>
           <a:prstGeom prst="rect">
             <a:avLst/>
@@ -19139,8 +19139,8 @@
         </p:nvSpPr>
         <p:spPr>
           <a:xfrm>
-            <a:off x="1481328" y="1976120"/>
-            <a:ext cx="3931920" cy="365760"/>
+            <a:off x="1481328" y="2262683"/>
+            <a:ext cx="4293108" cy="365760"/>
           </a:xfrm>
           <a:prstGeom prst="rect">
             <a:avLst/>
@@ -19168,7 +19168,7 @@
         </p:nvSpPr>
         <p:spPr>
           <a:xfrm>
-            <a:off x="6277356" y="1773936"/>
+            <a:off x="6277356" y="1945386"/>
             <a:ext cx="566928" cy="566928"/>
           </a:xfrm>
           <a:prstGeom prst="roundRect">
@@ -19215,8 +19215,8 @@
         </p:nvSpPr>
         <p:spPr>
           <a:xfrm>
-            <a:off x="7210044" y="2159000"/>
-            <a:ext cx="3931920" cy="0"/>
+            <a:off x="7210044" y="2445563"/>
+            <a:ext cx="4293108" cy="0"/>
           </a:xfrm>
           <a:prstGeom prst="line">
             <a:avLst/>
@@ -19240,7 +19240,7 @@
         </p:nvSpPr>
         <p:spPr>
           <a:xfrm>
-            <a:off x="7484364" y="2012696"/>
+            <a:off x="7484364" y="2299259"/>
             <a:ext cx="0" cy="292608"/>
           </a:xfrm>
           <a:prstGeom prst="line">
@@ -19263,7 +19263,7 @@
         </p:nvSpPr>
         <p:spPr>
           <a:xfrm>
-            <a:off x="7027164" y="2341880"/>
+            <a:off x="7027164" y="2628443"/>
             <a:ext cx="914400" cy="264160"/>
           </a:xfrm>
           <a:prstGeom prst="rect">
@@ -19302,7 +19302,7 @@
         </p:nvSpPr>
         <p:spPr>
           <a:xfrm>
-            <a:off x="7822692" y="2012696"/>
+            <a:off x="7858811" y="2299259"/>
             <a:ext cx="0" cy="292608"/>
           </a:xfrm>
           <a:prstGeom prst="line">
@@ -19325,7 +19325,7 @@
         </p:nvSpPr>
         <p:spPr>
           <a:xfrm>
-            <a:off x="7365492" y="2341880"/>
+            <a:off x="7401611" y="2628443"/>
             <a:ext cx="914400" cy="264160"/>
           </a:xfrm>
           <a:prstGeom prst="rect">
@@ -19364,7 +19364,7 @@
         </p:nvSpPr>
         <p:spPr>
           <a:xfrm>
-            <a:off x="8161020" y="2012696"/>
+            <a:off x="8233258" y="2299259"/>
             <a:ext cx="0" cy="292608"/>
           </a:xfrm>
           <a:prstGeom prst="line">
@@ -19387,7 +19387,7 @@
         </p:nvSpPr>
         <p:spPr>
           <a:xfrm>
-            <a:off x="7703820" y="2341880"/>
+            <a:off x="7776058" y="2628443"/>
             <a:ext cx="914400" cy="264160"/>
           </a:xfrm>
           <a:prstGeom prst="rect">
@@ -19426,7 +19426,7 @@
         </p:nvSpPr>
         <p:spPr>
           <a:xfrm>
-            <a:off x="8499348" y="2012696"/>
+            <a:off x="8607704" y="2299259"/>
             <a:ext cx="0" cy="292608"/>
           </a:xfrm>
           <a:prstGeom prst="line">
@@ -19449,7 +19449,7 @@
         </p:nvSpPr>
         <p:spPr>
           <a:xfrm>
-            <a:off x="8042148" y="2341880"/>
+            <a:off x="8150504" y="2628443"/>
             <a:ext cx="914400" cy="264160"/>
           </a:xfrm>
           <a:prstGeom prst="rect">
@@ -19488,7 +19488,7 @@
         </p:nvSpPr>
         <p:spPr>
           <a:xfrm>
-            <a:off x="8837676" y="2012696"/>
+            <a:off x="8982151" y="2299259"/>
             <a:ext cx="0" cy="292608"/>
           </a:xfrm>
           <a:prstGeom prst="line">
@@ -19511,7 +19511,7 @@
         </p:nvSpPr>
         <p:spPr>
           <a:xfrm>
-            <a:off x="8380476" y="2341880"/>
+            <a:off x="8524951" y="2628443"/>
             <a:ext cx="914400" cy="264160"/>
           </a:xfrm>
           <a:prstGeom prst="rect">
@@ -19550,7 +19550,7 @@
         </p:nvSpPr>
         <p:spPr>
           <a:xfrm>
-            <a:off x="9176004" y="2012696"/>
+            <a:off x="9356598" y="2299259"/>
             <a:ext cx="0" cy="292608"/>
           </a:xfrm>
           <a:prstGeom prst="line">
@@ -19573,7 +19573,7 @@
         </p:nvSpPr>
         <p:spPr>
           <a:xfrm>
-            <a:off x="8718804" y="2341880"/>
+            <a:off x="8899398" y="2628443"/>
             <a:ext cx="914400" cy="264160"/>
           </a:xfrm>
           <a:prstGeom prst="rect">
@@ -19612,7 +19612,7 @@
         </p:nvSpPr>
         <p:spPr>
           <a:xfrm>
-            <a:off x="9514332" y="2012696"/>
+            <a:off x="9731045" y="2299259"/>
             <a:ext cx="0" cy="292608"/>
           </a:xfrm>
           <a:prstGeom prst="line">
@@ -19635,7 +19635,7 @@
         </p:nvSpPr>
         <p:spPr>
           <a:xfrm>
-            <a:off x="9057132" y="2341880"/>
+            <a:off x="9273845" y="2628443"/>
             <a:ext cx="914400" cy="264160"/>
           </a:xfrm>
           <a:prstGeom prst="rect">
@@ -19674,7 +19674,7 @@
         </p:nvSpPr>
         <p:spPr>
           <a:xfrm>
-            <a:off x="9852660" y="2012696"/>
+            <a:off x="10105492" y="2299259"/>
             <a:ext cx="0" cy="292608"/>
           </a:xfrm>
           <a:prstGeom prst="line">
@@ -19697,7 +19697,7 @@
         </p:nvSpPr>
         <p:spPr>
           <a:xfrm>
-            <a:off x="9395460" y="2341880"/>
+            <a:off x="9648292" y="2628443"/>
             <a:ext cx="914400" cy="264160"/>
           </a:xfrm>
           <a:prstGeom prst="rect">
@@ -19736,7 +19736,7 @@
         </p:nvSpPr>
         <p:spPr>
           <a:xfrm>
-            <a:off x="10190988" y="2012696"/>
+            <a:off x="10479938" y="2299259"/>
             <a:ext cx="0" cy="292608"/>
           </a:xfrm>
           <a:prstGeom prst="line">
@@ -19759,7 +19759,7 @@
         </p:nvSpPr>
         <p:spPr>
           <a:xfrm>
-            <a:off x="9733788" y="2341880"/>
+            <a:off x="10022738" y="2628443"/>
             <a:ext cx="914400" cy="264160"/>
           </a:xfrm>
           <a:prstGeom prst="rect">
@@ -19798,7 +19798,7 @@
         </p:nvSpPr>
         <p:spPr>
           <a:xfrm>
-            <a:off x="10529316" y="2012696"/>
+            <a:off x="10854385" y="2299259"/>
             <a:ext cx="0" cy="292608"/>
           </a:xfrm>
           <a:prstGeom prst="line">
@@ -19821,7 +19821,7 @@
         </p:nvSpPr>
         <p:spPr>
           <a:xfrm>
-            <a:off x="10072116" y="2341880"/>
+            <a:off x="10397185" y="2628443"/>
             <a:ext cx="914400" cy="264160"/>
           </a:xfrm>
           <a:prstGeom prst="rect">
@@ -19860,7 +19860,7 @@
         </p:nvSpPr>
         <p:spPr>
           <a:xfrm>
-            <a:off x="10867644" y="2012696"/>
+            <a:off x="11228832" y="2299259"/>
             <a:ext cx="0" cy="292608"/>
           </a:xfrm>
           <a:prstGeom prst="line">
@@ -19883,7 +19883,7 @@
         </p:nvSpPr>
         <p:spPr>
           <a:xfrm>
-            <a:off x="10410444" y="2341880"/>
+            <a:off x="10771632" y="2628443"/>
             <a:ext cx="914400" cy="264160"/>
           </a:xfrm>
           <a:prstGeom prst="rect">
@@ -19922,7 +19922,7 @@
         </p:nvSpPr>
         <p:spPr>
           <a:xfrm>
-            <a:off x="7392924" y="2067560"/>
+            <a:off x="7392924" y="2354123"/>
             <a:ext cx="182880" cy="182880"/>
           </a:xfrm>
           <a:prstGeom prst="ellipse">
@@ -19947,7 +19947,7 @@
         </p:nvSpPr>
         <p:spPr>
           <a:xfrm>
-            <a:off x="9761220" y="2067560"/>
+            <a:off x="10014052" y="2354123"/>
             <a:ext cx="182880" cy="182880"/>
           </a:xfrm>
           <a:prstGeom prst="ellipse">
@@ -19972,7 +19972,7 @@
         </p:nvSpPr>
         <p:spPr>
           <a:xfrm flipV="1">
-            <a:off x="7484364" y="1774952"/>
+            <a:off x="7484364" y="2061515"/>
             <a:ext cx="0" cy="338328"/>
           </a:xfrm>
           <a:prstGeom prst="line">
@@ -19995,8 +19995,8 @@
         </p:nvSpPr>
         <p:spPr>
           <a:xfrm>
-            <a:off x="7484364" y="1774952"/>
-            <a:ext cx="2368296" cy="0"/>
+            <a:off x="7484364" y="2061515"/>
+            <a:ext cx="2621128" cy="0"/>
           </a:xfrm>
           <a:prstGeom prst="line">
             <a:avLst/>
@@ -20019,8 +20019,8 @@
         </p:nvSpPr>
         <p:spPr>
           <a:xfrm>
-            <a:off x="7484364" y="1492504"/>
-            <a:ext cx="2368296" cy="264160"/>
+            <a:off x="7484364" y="1779067"/>
+            <a:ext cx="2621128" cy="264160"/>
           </a:xfrm>
           <a:prstGeom prst="rect">
             <a:avLst/>
@@ -20058,8 +20058,8 @@
         </p:nvSpPr>
         <p:spPr>
           <a:xfrm>
-            <a:off x="7210044" y="1976120"/>
-            <a:ext cx="3931920" cy="365760"/>
+            <a:off x="7210044" y="2262683"/>
+            <a:ext cx="4293108" cy="365760"/>
           </a:xfrm>
           <a:prstGeom prst="rect">
             <a:avLst/>
@@ -20087,7 +20087,7 @@
         </p:nvSpPr>
         <p:spPr>
           <a:xfrm>
-            <a:off x="548640" y="3762756"/>
+            <a:off x="548640" y="3934206"/>
             <a:ext cx="566928" cy="566928"/>
           </a:xfrm>
           <a:prstGeom prst="roundRect">
@@ -20134,8 +20134,8 @@
         </p:nvSpPr>
         <p:spPr>
           <a:xfrm>
-            <a:off x="1481328" y="4147820"/>
-            <a:ext cx="3931920" cy="0"/>
+            <a:off x="1481328" y="4434383"/>
+            <a:ext cx="4293108" cy="0"/>
           </a:xfrm>
           <a:prstGeom prst="line">
             <a:avLst/>
@@ -20159,7 +20159,7 @@
         </p:nvSpPr>
         <p:spPr>
           <a:xfrm>
-            <a:off x="1755648" y="4001516"/>
+            <a:off x="1755648" y="4288079"/>
             <a:ext cx="0" cy="292608"/>
           </a:xfrm>
           <a:prstGeom prst="line">
@@ -20182,7 +20182,7 @@
         </p:nvSpPr>
         <p:spPr>
           <a:xfrm>
-            <a:off x="1298448" y="4330700"/>
+            <a:off x="1298448" y="4617263"/>
             <a:ext cx="914400" cy="264160"/>
           </a:xfrm>
           <a:prstGeom prst="rect">
@@ -20221,7 +20221,7 @@
         </p:nvSpPr>
         <p:spPr>
           <a:xfrm>
-            <a:off x="2093976" y="4001516"/>
+            <a:off x="2130095" y="4288079"/>
             <a:ext cx="0" cy="292608"/>
           </a:xfrm>
           <a:prstGeom prst="line">
@@ -20244,7 +20244,7 @@
         </p:nvSpPr>
         <p:spPr>
           <a:xfrm>
-            <a:off x="1636776" y="4330700"/>
+            <a:off x="1672895" y="4617263"/>
             <a:ext cx="914400" cy="264160"/>
           </a:xfrm>
           <a:prstGeom prst="rect">
@@ -20283,7 +20283,7 @@
         </p:nvSpPr>
         <p:spPr>
           <a:xfrm>
-            <a:off x="2432304" y="4001516"/>
+            <a:off x="2504542" y="4288079"/>
             <a:ext cx="0" cy="292608"/>
           </a:xfrm>
           <a:prstGeom prst="line">
@@ -20306,7 +20306,7 @@
         </p:nvSpPr>
         <p:spPr>
           <a:xfrm>
-            <a:off x="1975104" y="4330700"/>
+            <a:off x="2047342" y="4617263"/>
             <a:ext cx="914400" cy="264160"/>
           </a:xfrm>
           <a:prstGeom prst="rect">
@@ -20345,7 +20345,7 @@
         </p:nvSpPr>
         <p:spPr>
           <a:xfrm>
-            <a:off x="2770632" y="4001516"/>
+            <a:off x="2878988" y="4288079"/>
             <a:ext cx="0" cy="292608"/>
           </a:xfrm>
           <a:prstGeom prst="line">
@@ -20368,7 +20368,7 @@
         </p:nvSpPr>
         <p:spPr>
           <a:xfrm>
-            <a:off x="2313432" y="4330700"/>
+            <a:off x="2421788" y="4617263"/>
             <a:ext cx="914400" cy="264160"/>
           </a:xfrm>
           <a:prstGeom prst="rect">
@@ -20407,7 +20407,7 @@
         </p:nvSpPr>
         <p:spPr>
           <a:xfrm>
-            <a:off x="3108960" y="4001516"/>
+            <a:off x="3253435" y="4288079"/>
             <a:ext cx="0" cy="292608"/>
           </a:xfrm>
           <a:prstGeom prst="line">
@@ -20430,7 +20430,7 @@
         </p:nvSpPr>
         <p:spPr>
           <a:xfrm>
-            <a:off x="2651760" y="4330700"/>
+            <a:off x="2796235" y="4617263"/>
             <a:ext cx="914400" cy="264160"/>
           </a:xfrm>
           <a:prstGeom prst="rect">
@@ -20469,7 +20469,7 @@
         </p:nvSpPr>
         <p:spPr>
           <a:xfrm>
-            <a:off x="3447288" y="4001516"/>
+            <a:off x="3627882" y="4288079"/>
             <a:ext cx="0" cy="292608"/>
           </a:xfrm>
           <a:prstGeom prst="line">
@@ -20492,7 +20492,7 @@
         </p:nvSpPr>
         <p:spPr>
           <a:xfrm>
-            <a:off x="2990088" y="4330700"/>
+            <a:off x="3170682" y="4617263"/>
             <a:ext cx="914400" cy="264160"/>
           </a:xfrm>
           <a:prstGeom prst="rect">
@@ -20531,7 +20531,7 @@
         </p:nvSpPr>
         <p:spPr>
           <a:xfrm>
-            <a:off x="3785616" y="4001516"/>
+            <a:off x="4002329" y="4288079"/>
             <a:ext cx="0" cy="292608"/>
           </a:xfrm>
           <a:prstGeom prst="line">
@@ -20554,7 +20554,7 @@
         </p:nvSpPr>
         <p:spPr>
           <a:xfrm>
-            <a:off x="3328416" y="4330700"/>
+            <a:off x="3545129" y="4617263"/>
             <a:ext cx="914400" cy="264160"/>
           </a:xfrm>
           <a:prstGeom prst="rect">
@@ -20593,7 +20593,7 @@
         </p:nvSpPr>
         <p:spPr>
           <a:xfrm>
-            <a:off x="4123944" y="4001516"/>
+            <a:off x="4376776" y="4288079"/>
             <a:ext cx="0" cy="292608"/>
           </a:xfrm>
           <a:prstGeom prst="line">
@@ -20616,7 +20616,7 @@
         </p:nvSpPr>
         <p:spPr>
           <a:xfrm>
-            <a:off x="3666744" y="4330700"/>
+            <a:off x="3919576" y="4617263"/>
             <a:ext cx="914400" cy="264160"/>
           </a:xfrm>
           <a:prstGeom prst="rect">
@@ -20655,7 +20655,7 @@
         </p:nvSpPr>
         <p:spPr>
           <a:xfrm>
-            <a:off x="4462272" y="4001516"/>
+            <a:off x="4751222" y="4288079"/>
             <a:ext cx="0" cy="292608"/>
           </a:xfrm>
           <a:prstGeom prst="line">
@@ -20678,7 +20678,7 @@
         </p:nvSpPr>
         <p:spPr>
           <a:xfrm>
-            <a:off x="4005072" y="4330700"/>
+            <a:off x="4294022" y="4617263"/>
             <a:ext cx="914400" cy="264160"/>
           </a:xfrm>
           <a:prstGeom prst="rect">
@@ -20717,7 +20717,7 @@
         </p:nvSpPr>
         <p:spPr>
           <a:xfrm>
-            <a:off x="4800600" y="4001516"/>
+            <a:off x="5125669" y="4288079"/>
             <a:ext cx="0" cy="292608"/>
           </a:xfrm>
           <a:prstGeom prst="line">
@@ -20740,7 +20740,7 @@
         </p:nvSpPr>
         <p:spPr>
           <a:xfrm>
-            <a:off x="4343400" y="4330700"/>
+            <a:off x="4668469" y="4617263"/>
             <a:ext cx="914400" cy="264160"/>
           </a:xfrm>
           <a:prstGeom prst="rect">
@@ -20779,7 +20779,7 @@
         </p:nvSpPr>
         <p:spPr>
           <a:xfrm>
-            <a:off x="5138928" y="4001516"/>
+            <a:off x="5500116" y="4288079"/>
             <a:ext cx="0" cy="292608"/>
           </a:xfrm>
           <a:prstGeom prst="line">
@@ -20802,7 +20802,7 @@
         </p:nvSpPr>
         <p:spPr>
           <a:xfrm>
-            <a:off x="4681728" y="4330700"/>
+            <a:off x="5042916" y="4617263"/>
             <a:ext cx="914400" cy="264160"/>
           </a:xfrm>
           <a:prstGeom prst="rect">
@@ -20841,7 +20841,7 @@
         </p:nvSpPr>
         <p:spPr>
           <a:xfrm>
-            <a:off x="2002536" y="4056380"/>
+            <a:off x="2038655" y="4342943"/>
             <a:ext cx="182880" cy="182880"/>
           </a:xfrm>
           <a:prstGeom prst="ellipse">
@@ -20866,7 +20866,7 @@
         </p:nvSpPr>
         <p:spPr>
           <a:xfrm>
-            <a:off x="3355848" y="4056380"/>
+            <a:off x="3536442" y="4342943"/>
             <a:ext cx="182880" cy="182880"/>
           </a:xfrm>
           <a:prstGeom prst="ellipse">
@@ -20891,7 +20891,7 @@
         </p:nvSpPr>
         <p:spPr>
           <a:xfrm flipV="1">
-            <a:off x="2093976" y="3763772"/>
+            <a:off x="2130095" y="4050335"/>
             <a:ext cx="0" cy="338328"/>
           </a:xfrm>
           <a:prstGeom prst="line">
@@ -20914,8 +20914,8 @@
         </p:nvSpPr>
         <p:spPr>
           <a:xfrm>
-            <a:off x="2093976" y="3763772"/>
-            <a:ext cx="1353312" cy="0"/>
+            <a:off x="2130095" y="4050335"/>
+            <a:ext cx="1497787" cy="0"/>
           </a:xfrm>
           <a:prstGeom prst="line">
             <a:avLst/>
@@ -20938,8 +20938,8 @@
         </p:nvSpPr>
         <p:spPr>
           <a:xfrm>
-            <a:off x="2093976" y="3481324"/>
-            <a:ext cx="1353312" cy="264160"/>
+            <a:off x="2130095" y="3767887"/>
+            <a:ext cx="1497787" cy="264160"/>
           </a:xfrm>
           <a:prstGeom prst="rect">
             <a:avLst/>
@@ -20977,8 +20977,8 @@
         </p:nvSpPr>
         <p:spPr>
           <a:xfrm>
-            <a:off x="1481328" y="3964940"/>
-            <a:ext cx="3931920" cy="365760"/>
+            <a:off x="1481328" y="4251503"/>
+            <a:ext cx="4293108" cy="365760"/>
           </a:xfrm>
           <a:prstGeom prst="rect">
             <a:avLst/>
@@ -21006,7 +21006,7 @@
         </p:nvSpPr>
         <p:spPr>
           <a:xfrm>
-            <a:off x="6277356" y="3762756"/>
+            <a:off x="6277356" y="3934206"/>
             <a:ext cx="566928" cy="566928"/>
           </a:xfrm>
           <a:prstGeom prst="roundRect">
@@ -21053,8 +21053,8 @@
         </p:nvSpPr>
         <p:spPr>
           <a:xfrm>
-            <a:off x="7210044" y="4147820"/>
-            <a:ext cx="3931920" cy="0"/>
+            <a:off x="7210044" y="4434383"/>
+            <a:ext cx="4293108" cy="0"/>
           </a:xfrm>
           <a:prstGeom prst="line">
             <a:avLst/>
@@ -21078,7 +21078,7 @@
         </p:nvSpPr>
         <p:spPr>
           <a:xfrm>
-            <a:off x="7484364" y="4001516"/>
+            <a:off x="7484364" y="4288079"/>
             <a:ext cx="0" cy="292608"/>
           </a:xfrm>
           <a:prstGeom prst="line">
@@ -21101,7 +21101,7 @@
         </p:nvSpPr>
         <p:spPr>
           <a:xfrm>
-            <a:off x="7027164" y="4330700"/>
+            <a:off x="7027164" y="4617263"/>
             <a:ext cx="914400" cy="264160"/>
           </a:xfrm>
           <a:prstGeom prst="rect">
@@ -21140,7 +21140,7 @@
         </p:nvSpPr>
         <p:spPr>
           <a:xfrm>
-            <a:off x="7822692" y="4001516"/>
+            <a:off x="7858811" y="4288079"/>
             <a:ext cx="0" cy="292608"/>
           </a:xfrm>
           <a:prstGeom prst="line">
@@ -21163,7 +21163,7 @@
         </p:nvSpPr>
         <p:spPr>
           <a:xfrm>
-            <a:off x="7365492" y="4330700"/>
+            <a:off x="7401611" y="4617263"/>
             <a:ext cx="914400" cy="264160"/>
           </a:xfrm>
           <a:prstGeom prst="rect">
@@ -21202,7 +21202,7 @@
         </p:nvSpPr>
         <p:spPr>
           <a:xfrm>
-            <a:off x="8161020" y="4001516"/>
+            <a:off x="8233258" y="4288079"/>
             <a:ext cx="0" cy="292608"/>
           </a:xfrm>
           <a:prstGeom prst="line">
@@ -21225,7 +21225,7 @@
         </p:nvSpPr>
         <p:spPr>
           <a:xfrm>
-            <a:off x="7703820" y="4330700"/>
+            <a:off x="7776058" y="4617263"/>
             <a:ext cx="914400" cy="264160"/>
           </a:xfrm>
           <a:prstGeom prst="rect">
@@ -21264,7 +21264,7 @@
         </p:nvSpPr>
         <p:spPr>
           <a:xfrm>
-            <a:off x="8499348" y="4001516"/>
+            <a:off x="8607704" y="4288079"/>
             <a:ext cx="0" cy="292608"/>
           </a:xfrm>
           <a:prstGeom prst="line">
@@ -21287,7 +21287,7 @@
         </p:nvSpPr>
         <p:spPr>
           <a:xfrm>
-            <a:off x="8042148" y="4330700"/>
+            <a:off x="8150504" y="4617263"/>
             <a:ext cx="914400" cy="264160"/>
           </a:xfrm>
           <a:prstGeom prst="rect">
@@ -21326,7 +21326,7 @@
         </p:nvSpPr>
         <p:spPr>
           <a:xfrm>
-            <a:off x="8837676" y="4001516"/>
+            <a:off x="8982151" y="4288079"/>
             <a:ext cx="0" cy="292608"/>
           </a:xfrm>
           <a:prstGeom prst="line">
@@ -21349,7 +21349,7 @@
         </p:nvSpPr>
         <p:spPr>
           <a:xfrm>
-            <a:off x="8380476" y="4330700"/>
+            <a:off x="8524951" y="4617263"/>
             <a:ext cx="914400" cy="264160"/>
           </a:xfrm>
           <a:prstGeom prst="rect">
@@ -21388,7 +21388,7 @@
         </p:nvSpPr>
         <p:spPr>
           <a:xfrm>
-            <a:off x="9176004" y="4001516"/>
+            <a:off x="9356598" y="4288079"/>
             <a:ext cx="0" cy="292608"/>
           </a:xfrm>
           <a:prstGeom prst="line">
@@ -21411,7 +21411,7 @@
         </p:nvSpPr>
         <p:spPr>
           <a:xfrm>
-            <a:off x="8718804" y="4330700"/>
+            <a:off x="8899398" y="4617263"/>
             <a:ext cx="914400" cy="264160"/>
           </a:xfrm>
           <a:prstGeom prst="rect">
@@ -21450,7 +21450,7 @@
         </p:nvSpPr>
         <p:spPr>
           <a:xfrm>
-            <a:off x="9514332" y="4001516"/>
+            <a:off x="9731045" y="4288079"/>
             <a:ext cx="0" cy="292608"/>
           </a:xfrm>
           <a:prstGeom prst="line">
@@ -21473,7 +21473,7 @@
         </p:nvSpPr>
         <p:spPr>
           <a:xfrm>
-            <a:off x="9057132" y="4330700"/>
+            <a:off x="9273845" y="4617263"/>
             <a:ext cx="914400" cy="264160"/>
           </a:xfrm>
           <a:prstGeom prst="rect">
@@ -21512,7 +21512,7 @@
         </p:nvSpPr>
         <p:spPr>
           <a:xfrm>
-            <a:off x="9852660" y="4001516"/>
+            <a:off x="10105492" y="4288079"/>
             <a:ext cx="0" cy="292608"/>
           </a:xfrm>
           <a:prstGeom prst="line">
@@ -21535,7 +21535,7 @@
         </p:nvSpPr>
         <p:spPr>
           <a:xfrm>
-            <a:off x="9395460" y="4330700"/>
+            <a:off x="9648292" y="4617263"/>
             <a:ext cx="914400" cy="264160"/>
           </a:xfrm>
           <a:prstGeom prst="rect">
@@ -21574,7 +21574,7 @@
         </p:nvSpPr>
         <p:spPr>
           <a:xfrm>
-            <a:off x="10190988" y="4001516"/>
+            <a:off x="10479938" y="4288079"/>
             <a:ext cx="0" cy="292608"/>
           </a:xfrm>
           <a:prstGeom prst="line">
@@ -21597,7 +21597,7 @@
         </p:nvSpPr>
         <p:spPr>
           <a:xfrm>
-            <a:off x="9733788" y="4330700"/>
+            <a:off x="10022738" y="4617263"/>
             <a:ext cx="914400" cy="264160"/>
           </a:xfrm>
           <a:prstGeom prst="rect">
@@ -21636,7 +21636,7 @@
         </p:nvSpPr>
         <p:spPr>
           <a:xfrm>
-            <a:off x="10529316" y="4001516"/>
+            <a:off x="10854385" y="4288079"/>
             <a:ext cx="0" cy="292608"/>
           </a:xfrm>
           <a:prstGeom prst="line">
@@ -21659,7 +21659,7 @@
         </p:nvSpPr>
         <p:spPr>
           <a:xfrm>
-            <a:off x="10072116" y="4330700"/>
+            <a:off x="10397185" y="4617263"/>
             <a:ext cx="914400" cy="264160"/>
           </a:xfrm>
           <a:prstGeom prst="rect">
@@ -21698,7 +21698,7 @@
         </p:nvSpPr>
         <p:spPr>
           <a:xfrm>
-            <a:off x="10867644" y="4001516"/>
+            <a:off x="11228832" y="4288079"/>
             <a:ext cx="0" cy="292608"/>
           </a:xfrm>
           <a:prstGeom prst="line">
@@ -21721,7 +21721,7 @@
         </p:nvSpPr>
         <p:spPr>
           <a:xfrm>
-            <a:off x="10410444" y="4330700"/>
+            <a:off x="10771632" y="4617263"/>
             <a:ext cx="914400" cy="264160"/>
           </a:xfrm>
           <a:prstGeom prst="rect">
@@ -21760,7 +21760,7 @@
         </p:nvSpPr>
         <p:spPr>
           <a:xfrm>
-            <a:off x="8407908" y="4056380"/>
+            <a:off x="8516264" y="4342943"/>
             <a:ext cx="182880" cy="182880"/>
           </a:xfrm>
           <a:prstGeom prst="ellipse">
@@ -21785,7 +21785,7 @@
         </p:nvSpPr>
         <p:spPr>
           <a:xfrm>
-            <a:off x="10437876" y="4056380"/>
+            <a:off x="10762945" y="4342943"/>
             <a:ext cx="182880" cy="182880"/>
           </a:xfrm>
           <a:prstGeom prst="ellipse">
@@ -21810,7 +21810,7 @@
         </p:nvSpPr>
         <p:spPr>
           <a:xfrm flipV="1">
-            <a:off x="8499348" y="3763772"/>
+            <a:off x="8607704" y="4050335"/>
             <a:ext cx="0" cy="338328"/>
           </a:xfrm>
           <a:prstGeom prst="line">
@@ -21833,8 +21833,8 @@
         </p:nvSpPr>
         <p:spPr>
           <a:xfrm>
-            <a:off x="8499348" y="3763772"/>
-            <a:ext cx="2029968" cy="0"/>
+            <a:off x="8607704" y="4050335"/>
+            <a:ext cx="2246681" cy="0"/>
           </a:xfrm>
           <a:prstGeom prst="line">
             <a:avLst/>
@@ -21857,8 +21857,8 @@
         </p:nvSpPr>
         <p:spPr>
           <a:xfrm>
-            <a:off x="8499348" y="3481324"/>
-            <a:ext cx="2029968" cy="264160"/>
+            <a:off x="8607704" y="3767887"/>
+            <a:ext cx="2246681" cy="264160"/>
           </a:xfrm>
           <a:prstGeom prst="rect">
             <a:avLst/>
@@ -21896,8 +21896,8 @@
         </p:nvSpPr>
         <p:spPr>
           <a:xfrm>
-            <a:off x="7210044" y="3964940"/>
-            <a:ext cx="3931920" cy="365760"/>
+            <a:off x="7210044" y="4251503"/>
+            <a:ext cx="4293108" cy="365760"/>
           </a:xfrm>
           <a:prstGeom prst="rect">
             <a:avLst/>

--- a/dist/초2/수학/도형과측정/초2_수학_도형과측정_03_길이재기_학생용.pptx
+++ b/dist/초2/수학/도형과측정/초2_수학_도형과측정_03_길이재기_학생용.pptx
@@ -121,13 +121,13 @@
   <p:extLst>
     <p:ext uri="{521415D9-36F7-43E2-AB2F-B90AF26B5E84}">
       <p14:sectionLst xmlns:p14="http://schemas.microsoft.com/office/powerpoint/2010/main">
-        <p14:section name="도입" id="{e9a7f24e-787f-d301-b310-3d34628b2697}">
+        <p14:section name="도입" id="{e3f7af85-a419-e6e7-e2c8-9da89f6ddbb0}">
           <p14:sldIdLst>
             <p14:sldId id="256"/>
             <p14:sldId id="257"/>
           </p14:sldIdLst>
         </p14:section>
-        <p14:section name="개념" id="{4d3f0218-d3b0-2108-3b17-82d4a8e70c73}">
+        <p14:section name="개념" id="{2b2ba3d0-9875-f2e6-51f9-a2ba8517147b}">
           <p14:sldIdLst>
             <p14:sldId id="258"/>
             <p14:sldId id="259"/>
@@ -137,31 +137,31 @@
             <p14:sldId id="265"/>
           </p14:sldIdLst>
         </p14:section>
-        <p14:section name="연습" id="{bf470ae0-cb7f-284d-16a2-b60697ec6637}">
+        <p14:section name="연습" id="{337be0d3-cf66-a7c8-fb4d-488117510d4e}">
           <p14:sldIdLst>
             <p14:sldId id="262"/>
             <p14:sldId id="263"/>
             <p14:sldId id="266"/>
           </p14:sldIdLst>
         </p14:section>
-        <p14:section name="개념" id="{58004ac1-7970-3c69-6860-36285a40a95c}">
+        <p14:section name="개념" id="{e677f57d-f4c9-96f8-22b5-7b690cb39a54}">
           <p14:sldIdLst/>
         </p14:section>
-        <p14:section name="연습" id="{1710294d-dd12-fece-fc8a-6283fc172c8b}">
+        <p14:section name="연습" id="{098f404f-3161-b3a6-83f0-c8c66a966f59}">
           <p14:sldIdLst/>
         </p14:section>
-        <p14:section name="확인" id="{e1eb5e41-66c1-bdae-4217-ed0fdbbbd953}">
+        <p14:section name="확인" id="{3e192642-d8e6-a780-1c26-a66c0ba45516}">
           <p14:sldIdLst>
             <p14:sldId id="267"/>
             <p14:sldId id="268"/>
           </p14:sldIdLst>
         </p14:section>
-        <p14:section name="정리" id="{32dec934-5f67-c3a8-cc04-979074661330}">
+        <p14:section name="정리" id="{d6433a92-970f-659b-87c5-446e80f2629d}">
           <p14:sldIdLst>
             <p14:sldId id="269"/>
           </p14:sldIdLst>
         </p14:section>
-        <p14:section name="보충" id="{6e61efc4-1955-f3bd-ee03-17e83e81ce71}">
+        <p14:section name="보충" id="{1ae14b23-8f30-62dd-54e1-0caa46fec405}">
           <p14:sldIdLst>
             <p14:sldId id="270"/>
           </p14:sldIdLst>
@@ -15108,7 +15108,7 @@
               <a:buNone/>
             </a:pPr>
             <a:r>
-              <a:rPr lang="ko-KR" altLang="en-US" sz="2600" b="1" dirty="0">
+              <a:rPr lang="en-US" altLang="ko-KR" sz="2600" b="1" dirty="0">
                 <a:solidFill>
                   <a:srgbClr val="3D5A80"/>
                 </a:solidFill>
@@ -15194,7 +15194,7 @@
               <a:buNone/>
             </a:pPr>
             <a:r>
-              <a:rPr lang="ko-KR" altLang="en-US" sz="2600" b="1" dirty="0">
+              <a:rPr lang="en-US" altLang="ko-KR" sz="2600" b="1" dirty="0">
                 <a:solidFill>
                   <a:srgbClr val="3D5A80"/>
                 </a:solidFill>
@@ -15280,7 +15280,7 @@
               <a:buNone/>
             </a:pPr>
             <a:r>
-              <a:rPr lang="ko-KR" altLang="en-US" sz="2600" b="1" dirty="0">
+              <a:rPr lang="en-US" altLang="ko-KR" sz="2600" b="1" dirty="0">
                 <a:solidFill>
                   <a:srgbClr val="3D5A80"/>
                 </a:solidFill>
